--- a/WELO_TAIC.pptx
+++ b/WELO_TAIC.pptx
@@ -3397,7 +3397,7 @@
         <p:spPr>
           <a:xfrm>
             <a:off x="406400" y="1371600"/>
-            <a:ext cx="2032000" cy="3517900"/>
+            <a:ext cx="1612900" cy="3517900"/>
           </a:xfrm>
           <a:prstGeom prst="rect">
             <a:avLst/>
@@ -3413,7 +3413,7 @@
         <p:spPr>
           <a:xfrm>
             <a:off x="406400" y="4699000"/>
-            <a:ext cx="2032000" cy="190500"/>
+            <a:ext cx="1612900" cy="190500"/>
           </a:xfrm>
           <a:prstGeom prst="rect">
             <a:avLst/>
@@ -3456,7 +3456,7 @@
         <p:spPr>
           <a:xfrm>
             <a:off x="444500" y="4711700"/>
-            <a:ext cx="1955800" cy="165100"/>
+            <a:ext cx="1536700" cy="165100"/>
           </a:xfrm>
           <a:prstGeom prst="rect">
             <a:avLst/>
@@ -3498,8 +3498,8 @@
         </p:blipFill>
         <p:spPr>
           <a:xfrm>
-            <a:off x="2501900" y="1371600"/>
-            <a:ext cx="2032000" cy="3517900"/>
+            <a:off x="2082800" y="1371600"/>
+            <a:ext cx="1612900" cy="3517900"/>
           </a:xfrm>
           <a:prstGeom prst="rect">
             <a:avLst/>
@@ -3514,8 +3514,8 @@
         </p:nvSpPr>
         <p:spPr>
           <a:xfrm>
-            <a:off x="2501900" y="4699000"/>
-            <a:ext cx="2032000" cy="190500"/>
+            <a:off x="2082800" y="4699000"/>
+            <a:ext cx="1612900" cy="190500"/>
           </a:xfrm>
           <a:prstGeom prst="rect">
             <a:avLst/>
@@ -3557,8 +3557,8 @@
         </p:nvSpPr>
         <p:spPr>
           <a:xfrm>
-            <a:off x="2540000" y="4711700"/>
-            <a:ext cx="1955800" cy="165100"/>
+            <a:off x="2120900" y="4711700"/>
+            <a:ext cx="1536700" cy="165100"/>
           </a:xfrm>
           <a:prstGeom prst="rect">
             <a:avLst/>
@@ -3600,8 +3600,8 @@
         </p:blipFill>
         <p:spPr>
           <a:xfrm>
-            <a:off x="4597400" y="1371600"/>
-            <a:ext cx="2032000" cy="3517900"/>
+            <a:off x="3759200" y="1371600"/>
+            <a:ext cx="1612900" cy="3517900"/>
           </a:xfrm>
           <a:prstGeom prst="rect">
             <a:avLst/>
@@ -3616,8 +3616,8 @@
         </p:nvSpPr>
         <p:spPr>
           <a:xfrm>
-            <a:off x="4597400" y="4699000"/>
-            <a:ext cx="2032000" cy="190500"/>
+            <a:off x="3759200" y="4699000"/>
+            <a:ext cx="1612900" cy="190500"/>
           </a:xfrm>
           <a:prstGeom prst="rect">
             <a:avLst/>
@@ -3659,8 +3659,8 @@
         </p:nvSpPr>
         <p:spPr>
           <a:xfrm>
-            <a:off x="4635500" y="4711700"/>
-            <a:ext cx="1955800" cy="165100"/>
+            <a:off x="3797300" y="4711700"/>
+            <a:ext cx="1536700" cy="165100"/>
           </a:xfrm>
           <a:prstGeom prst="rect">
             <a:avLst/>
@@ -3702,8 +3702,8 @@
         </p:blipFill>
         <p:spPr>
           <a:xfrm>
-            <a:off x="6692900" y="1371600"/>
-            <a:ext cx="2032000" cy="3517900"/>
+            <a:off x="5435600" y="1371600"/>
+            <a:ext cx="1612900" cy="3517900"/>
           </a:xfrm>
           <a:prstGeom prst="rect">
             <a:avLst/>
@@ -3718,8 +3718,8 @@
         </p:nvSpPr>
         <p:spPr>
           <a:xfrm>
-            <a:off x="6692900" y="4699000"/>
-            <a:ext cx="2032000" cy="190500"/>
+            <a:off x="5435600" y="4699000"/>
+            <a:ext cx="1612900" cy="190500"/>
           </a:xfrm>
           <a:prstGeom prst="rect">
             <a:avLst/>
@@ -3761,8 +3761,8 @@
         </p:nvSpPr>
         <p:spPr>
           <a:xfrm>
-            <a:off x="6731000" y="4711700"/>
-            <a:ext cx="1955800" cy="165100"/>
+            <a:off x="5473700" y="4711700"/>
+            <a:ext cx="1536700" cy="165100"/>
           </a:xfrm>
           <a:prstGeom prst="rect">
             <a:avLst/>
@@ -3788,9 +3788,111 @@
           </a:p>
         </p:txBody>
       </p:sp>
-      <p:sp>
-        <p:nvSpPr>
-          <p:cNvPr id="22" name="Rectangle 21"/>
+      <p:pic>
+        <p:nvPicPr>
+          <p:cNvPr id="22" name="Picture 21" descr="img_project4.jpg"/>
+          <p:cNvPicPr>
+            <a:picLocks noChangeAspect="1"/>
+          </p:cNvPicPr>
+          <p:nvPr/>
+        </p:nvPicPr>
+        <p:blipFill>
+          <a:blip r:embed="rId5"/>
+          <a:stretch>
+            <a:fillRect/>
+          </a:stretch>
+        </p:blipFill>
+        <p:spPr>
+          <a:xfrm>
+            <a:off x="7112000" y="1371600"/>
+            <a:ext cx="1612900" cy="3517900"/>
+          </a:xfrm>
+          <a:prstGeom prst="rect">
+            <a:avLst/>
+          </a:prstGeom>
+        </p:spPr>
+      </p:pic>
+      <p:sp>
+        <p:nvSpPr>
+          <p:cNvPr id="23" name="Rectangle 22"/>
+          <p:cNvSpPr/>
+          <p:nvPr/>
+        </p:nvSpPr>
+        <p:spPr>
+          <a:xfrm>
+            <a:off x="7112000" y="4699000"/>
+            <a:ext cx="1612900" cy="190500"/>
+          </a:xfrm>
+          <a:prstGeom prst="rect">
+            <a:avLst/>
+          </a:prstGeom>
+          <a:solidFill>
+            <a:srgbClr val="000000"/>
+          </a:solidFill>
+          <a:ln>
+            <a:noFill/>
+          </a:ln>
+        </p:spPr>
+        <p:style>
+          <a:lnRef idx="1">
+            <a:schemeClr val="accent1"/>
+          </a:lnRef>
+          <a:fillRef idx="3">
+            <a:schemeClr val="accent1"/>
+          </a:fillRef>
+          <a:effectRef idx="2">
+            <a:schemeClr val="accent1"/>
+          </a:effectRef>
+          <a:fontRef idx="minor">
+            <a:schemeClr val="lt1"/>
+          </a:fontRef>
+        </p:style>
+        <p:txBody>
+          <a:bodyPr rtlCol="0" anchor="ctr"/>
+          <a:lstStyle/>
+          <a:p>
+            <a:pPr algn="ctr"/>
+          </a:p>
+        </p:txBody>
+      </p:sp>
+      <p:sp>
+        <p:nvSpPr>
+          <p:cNvPr id="24" name="TextBox 23"/>
+          <p:cNvSpPr txBox="1"/>
+          <p:nvPr/>
+        </p:nvSpPr>
+        <p:spPr>
+          <a:xfrm>
+            <a:off x="7150100" y="4711700"/>
+            <a:ext cx="1536700" cy="165100"/>
+          </a:xfrm>
+          <a:prstGeom prst="rect">
+            <a:avLst/>
+          </a:prstGeom>
+          <a:noFill/>
+        </p:spPr>
+        <p:txBody>
+          <a:bodyPr wrap="square">
+            <a:spAutoFit/>
+          </a:bodyPr>
+          <a:lstStyle/>
+          <a:p>
+            <a:pPr algn="l"/>
+            <a:r>
+              <a:rPr sz="900" b="0" i="0">
+                <a:solidFill>
+                  <a:srgbClr val="FFFFFF"/>
+                </a:solidFill>
+                <a:latin typeface="Noto Sans KR"/>
+              </a:rPr>
+              <a:t>TRANA 서래</a:t>
+            </a:r>
+          </a:p>
+        </p:txBody>
+      </p:sp>
+      <p:sp>
+        <p:nvSpPr>
+          <p:cNvPr id="25" name="Rectangle 24"/>
           <p:cNvSpPr/>
           <p:nvPr/>
         </p:nvSpPr>
@@ -3833,7 +3935,7 @@
       </p:sp>
       <p:sp>
         <p:nvSpPr>
-          <p:cNvPr id="23" name="TextBox 22"/>
+          <p:cNvPr id="26" name="TextBox 25"/>
           <p:cNvSpPr txBox="1"/>
           <p:nvPr/>
         </p:nvSpPr>
@@ -4572,7 +4674,7 @@
         <p:spPr>
           <a:xfrm>
             <a:off x="5245100" y="723900"/>
-            <a:ext cx="3492500" cy="939800"/>
+            <a:ext cx="3492500" cy="965200"/>
           </a:xfrm>
           <a:prstGeom prst="rect">
             <a:avLst/>
@@ -4636,7 +4738,7 @@
                 </a:solidFill>
                 <a:latin typeface="Noto Sans KR"/>
               </a:rPr>
-              <a:t>1인 가구 비율 추이 (통계청)</a:t>
+              <a:t>1인 가구 비율 추이 — 통계청 장래가구추계 2022</a:t>
             </a:r>
           </a:p>
         </p:txBody>
@@ -4649,8 +4751,8 @@
         </p:nvSpPr>
         <p:spPr>
           <a:xfrm>
-            <a:off x="5308600" y="1282700"/>
-            <a:ext cx="641350" cy="82550"/>
+            <a:off x="5308600" y="1219200"/>
+            <a:ext cx="774700" cy="88900"/>
           </a:xfrm>
           <a:prstGeom prst="rect">
             <a:avLst/>
@@ -4667,11 +4769,11 @@
             <a:r>
               <a:rPr sz="800" b="0" i="0">
                 <a:solidFill>
-                  <a:srgbClr val="444444"/>
-                </a:solidFill>
-                <a:latin typeface="Noto Sans KR"/>
-              </a:rPr>
-              <a:t>27%</a:t>
+                  <a:srgbClr val="555555"/>
+                </a:solidFill>
+                <a:latin typeface="Noto Sans KR"/>
+              </a:rPr>
+              <a:t>27.2%</a:t>
             </a:r>
           </a:p>
         </p:txBody>
@@ -4684,8 +4786,729 @@
         </p:nvSpPr>
         <p:spPr>
           <a:xfrm>
-            <a:off x="5308600" y="1371600"/>
-            <a:ext cx="641350" cy="152400"/>
+            <a:off x="5308600" y="1314450"/>
+            <a:ext cx="774700" cy="222250"/>
+          </a:xfrm>
+          <a:prstGeom prst="rect">
+            <a:avLst/>
+          </a:prstGeom>
+          <a:solidFill>
+            <a:srgbClr val="CCCCCC"/>
+          </a:solidFill>
+          <a:ln>
+            <a:noFill/>
+          </a:ln>
+        </p:spPr>
+        <p:style>
+          <a:lnRef idx="1">
+            <a:schemeClr val="accent1"/>
+          </a:lnRef>
+          <a:fillRef idx="3">
+            <a:schemeClr val="accent1"/>
+          </a:fillRef>
+          <a:effectRef idx="2">
+            <a:schemeClr val="accent1"/>
+          </a:effectRef>
+          <a:fontRef idx="minor">
+            <a:schemeClr val="lt1"/>
+          </a:fontRef>
+        </p:style>
+        <p:txBody>
+          <a:bodyPr rtlCol="0" anchor="ctr"/>
+          <a:lstStyle/>
+          <a:p>
+            <a:pPr algn="ctr"/>
+          </a:p>
+        </p:txBody>
+      </p:sp>
+      <p:sp>
+        <p:nvSpPr>
+          <p:cNvPr id="24" name="TextBox 23"/>
+          <p:cNvSpPr txBox="1"/>
+          <p:nvPr/>
+        </p:nvSpPr>
+        <p:spPr>
+          <a:xfrm>
+            <a:off x="5308600" y="1555750"/>
+            <a:ext cx="774700" cy="88900"/>
+          </a:xfrm>
+          <a:prstGeom prst="rect">
+            <a:avLst/>
+          </a:prstGeom>
+          <a:noFill/>
+        </p:spPr>
+        <p:txBody>
+          <a:bodyPr wrap="square">
+            <a:spAutoFit/>
+          </a:bodyPr>
+          <a:lstStyle/>
+          <a:p>
+            <a:pPr algn="ctr"/>
+            <a:r>
+              <a:rPr sz="800" b="0" i="0">
+                <a:solidFill>
+                  <a:srgbClr val="999999"/>
+                </a:solidFill>
+                <a:latin typeface="Noto Sans KR"/>
+              </a:rPr>
+              <a:t>2015</a:t>
+            </a:r>
+          </a:p>
+        </p:txBody>
+      </p:sp>
+      <p:sp>
+        <p:nvSpPr>
+          <p:cNvPr id="25" name="TextBox 24"/>
+          <p:cNvSpPr txBox="1"/>
+          <p:nvPr/>
+        </p:nvSpPr>
+        <p:spPr>
+          <a:xfrm>
+            <a:off x="6172200" y="1200150"/>
+            <a:ext cx="774700" cy="88900"/>
+          </a:xfrm>
+          <a:prstGeom prst="rect">
+            <a:avLst/>
+          </a:prstGeom>
+          <a:noFill/>
+        </p:spPr>
+        <p:txBody>
+          <a:bodyPr wrap="square">
+            <a:spAutoFit/>
+          </a:bodyPr>
+          <a:lstStyle/>
+          <a:p>
+            <a:pPr algn="ctr"/>
+            <a:r>
+              <a:rPr sz="800" b="0" i="0">
+                <a:solidFill>
+                  <a:srgbClr val="444444"/>
+                </a:solidFill>
+                <a:latin typeface="Noto Sans KR"/>
+              </a:rPr>
+              <a:t>29.3%</a:t>
+            </a:r>
+          </a:p>
+        </p:txBody>
+      </p:sp>
+      <p:sp>
+        <p:nvSpPr>
+          <p:cNvPr id="26" name="Rectangle 25"/>
+          <p:cNvSpPr/>
+          <p:nvPr/>
+        </p:nvSpPr>
+        <p:spPr>
+          <a:xfrm>
+            <a:off x="6172200" y="1295400"/>
+            <a:ext cx="774700" cy="241300"/>
+          </a:xfrm>
+          <a:prstGeom prst="rect">
+            <a:avLst/>
+          </a:prstGeom>
+          <a:solidFill>
+            <a:srgbClr val="AAAAAA"/>
+          </a:solidFill>
+          <a:ln>
+            <a:noFill/>
+          </a:ln>
+        </p:spPr>
+        <p:style>
+          <a:lnRef idx="1">
+            <a:schemeClr val="accent1"/>
+          </a:lnRef>
+          <a:fillRef idx="3">
+            <a:schemeClr val="accent1"/>
+          </a:fillRef>
+          <a:effectRef idx="2">
+            <a:schemeClr val="accent1"/>
+          </a:effectRef>
+          <a:fontRef idx="minor">
+            <a:schemeClr val="lt1"/>
+          </a:fontRef>
+        </p:style>
+        <p:txBody>
+          <a:bodyPr rtlCol="0" anchor="ctr"/>
+          <a:lstStyle/>
+          <a:p>
+            <a:pPr algn="ctr"/>
+          </a:p>
+        </p:txBody>
+      </p:sp>
+      <p:sp>
+        <p:nvSpPr>
+          <p:cNvPr id="27" name="TextBox 26"/>
+          <p:cNvSpPr txBox="1"/>
+          <p:nvPr/>
+        </p:nvSpPr>
+        <p:spPr>
+          <a:xfrm>
+            <a:off x="6172200" y="1555750"/>
+            <a:ext cx="774700" cy="88900"/>
+          </a:xfrm>
+          <a:prstGeom prst="rect">
+            <a:avLst/>
+          </a:prstGeom>
+          <a:noFill/>
+        </p:spPr>
+        <p:txBody>
+          <a:bodyPr wrap="square">
+            <a:spAutoFit/>
+          </a:bodyPr>
+          <a:lstStyle/>
+          <a:p>
+            <a:pPr algn="ctr"/>
+            <a:r>
+              <a:rPr sz="800" b="0" i="0">
+                <a:solidFill>
+                  <a:srgbClr val="999999"/>
+                </a:solidFill>
+                <a:latin typeface="Noto Sans KR"/>
+              </a:rPr>
+              <a:t>2018</a:t>
+            </a:r>
+          </a:p>
+        </p:txBody>
+      </p:sp>
+      <p:sp>
+        <p:nvSpPr>
+          <p:cNvPr id="28" name="TextBox 27"/>
+          <p:cNvSpPr txBox="1"/>
+          <p:nvPr/>
+        </p:nvSpPr>
+        <p:spPr>
+          <a:xfrm>
+            <a:off x="7035800" y="1155700"/>
+            <a:ext cx="774700" cy="88900"/>
+          </a:xfrm>
+          <a:prstGeom prst="rect">
+            <a:avLst/>
+          </a:prstGeom>
+          <a:noFill/>
+        </p:spPr>
+        <p:txBody>
+          <a:bodyPr wrap="square">
+            <a:spAutoFit/>
+          </a:bodyPr>
+          <a:lstStyle/>
+          <a:p>
+            <a:pPr algn="ctr"/>
+            <a:r>
+              <a:rPr sz="800" b="0" i="0">
+                <a:solidFill>
+                  <a:srgbClr val="111111"/>
+                </a:solidFill>
+                <a:latin typeface="Noto Sans KR"/>
+              </a:rPr>
+              <a:t>34.5%</a:t>
+            </a:r>
+          </a:p>
+        </p:txBody>
+      </p:sp>
+      <p:sp>
+        <p:nvSpPr>
+          <p:cNvPr id="29" name="Rectangle 28"/>
+          <p:cNvSpPr/>
+          <p:nvPr/>
+        </p:nvSpPr>
+        <p:spPr>
+          <a:xfrm>
+            <a:off x="7035800" y="1250950"/>
+            <a:ext cx="774700" cy="285750"/>
+          </a:xfrm>
+          <a:prstGeom prst="rect">
+            <a:avLst/>
+          </a:prstGeom>
+          <a:solidFill>
+            <a:srgbClr val="555555"/>
+          </a:solidFill>
+          <a:ln>
+            <a:noFill/>
+          </a:ln>
+        </p:spPr>
+        <p:style>
+          <a:lnRef idx="1">
+            <a:schemeClr val="accent1"/>
+          </a:lnRef>
+          <a:fillRef idx="3">
+            <a:schemeClr val="accent1"/>
+          </a:fillRef>
+          <a:effectRef idx="2">
+            <a:schemeClr val="accent1"/>
+          </a:effectRef>
+          <a:fontRef idx="minor">
+            <a:schemeClr val="lt1"/>
+          </a:fontRef>
+        </p:style>
+        <p:txBody>
+          <a:bodyPr rtlCol="0" anchor="ctr"/>
+          <a:lstStyle/>
+          <a:p>
+            <a:pPr algn="ctr"/>
+          </a:p>
+        </p:txBody>
+      </p:sp>
+      <p:sp>
+        <p:nvSpPr>
+          <p:cNvPr id="30" name="TextBox 29"/>
+          <p:cNvSpPr txBox="1"/>
+          <p:nvPr/>
+        </p:nvSpPr>
+        <p:spPr>
+          <a:xfrm>
+            <a:off x="7035800" y="1555750"/>
+            <a:ext cx="774700" cy="88900"/>
+          </a:xfrm>
+          <a:prstGeom prst="rect">
+            <a:avLst/>
+          </a:prstGeom>
+          <a:noFill/>
+        </p:spPr>
+        <p:txBody>
+          <a:bodyPr wrap="square">
+            <a:spAutoFit/>
+          </a:bodyPr>
+          <a:lstStyle/>
+          <a:p>
+            <a:pPr algn="ctr"/>
+            <a:r>
+              <a:rPr sz="800" b="0" i="0">
+                <a:solidFill>
+                  <a:srgbClr val="999999"/>
+                </a:solidFill>
+                <a:latin typeface="Noto Sans KR"/>
+              </a:rPr>
+              <a:t>2023</a:t>
+            </a:r>
+          </a:p>
+        </p:txBody>
+      </p:sp>
+      <p:sp>
+        <p:nvSpPr>
+          <p:cNvPr id="31" name="TextBox 30"/>
+          <p:cNvSpPr txBox="1"/>
+          <p:nvPr/>
+        </p:nvSpPr>
+        <p:spPr>
+          <a:xfrm>
+            <a:off x="7899400" y="1111250"/>
+            <a:ext cx="774700" cy="88900"/>
+          </a:xfrm>
+          <a:prstGeom prst="rect">
+            <a:avLst/>
+          </a:prstGeom>
+          <a:noFill/>
+        </p:spPr>
+        <p:txBody>
+          <a:bodyPr wrap="square">
+            <a:spAutoFit/>
+          </a:bodyPr>
+          <a:lstStyle/>
+          <a:p>
+            <a:pPr algn="ctr"/>
+            <a:r>
+              <a:rPr sz="800" b="1" i="0">
+                <a:solidFill>
+                  <a:srgbClr val="CC0000"/>
+                </a:solidFill>
+                <a:latin typeface="Noto Sans KR"/>
+              </a:rPr>
+              <a:t>40%+</a:t>
+            </a:r>
+          </a:p>
+        </p:txBody>
+      </p:sp>
+      <p:sp>
+        <p:nvSpPr>
+          <p:cNvPr id="32" name="Rectangle 31"/>
+          <p:cNvSpPr/>
+          <p:nvPr/>
+        </p:nvSpPr>
+        <p:spPr>
+          <a:xfrm>
+            <a:off x="7899400" y="1206500"/>
+            <a:ext cx="774700" cy="330200"/>
+          </a:xfrm>
+          <a:prstGeom prst="rect">
+            <a:avLst/>
+          </a:prstGeom>
+          <a:solidFill>
+            <a:srgbClr val="CC0000"/>
+          </a:solidFill>
+          <a:ln>
+            <a:noFill/>
+          </a:ln>
+        </p:spPr>
+        <p:style>
+          <a:lnRef idx="1">
+            <a:schemeClr val="accent1"/>
+          </a:lnRef>
+          <a:fillRef idx="3">
+            <a:schemeClr val="accent1"/>
+          </a:fillRef>
+          <a:effectRef idx="2">
+            <a:schemeClr val="accent1"/>
+          </a:effectRef>
+          <a:fontRef idx="minor">
+            <a:schemeClr val="lt1"/>
+          </a:fontRef>
+        </p:style>
+        <p:txBody>
+          <a:bodyPr rtlCol="0" anchor="ctr"/>
+          <a:lstStyle/>
+          <a:p>
+            <a:pPr algn="ctr"/>
+          </a:p>
+        </p:txBody>
+      </p:sp>
+      <p:sp>
+        <p:nvSpPr>
+          <p:cNvPr id="33" name="TextBox 32"/>
+          <p:cNvSpPr txBox="1"/>
+          <p:nvPr/>
+        </p:nvSpPr>
+        <p:spPr>
+          <a:xfrm>
+            <a:off x="7899400" y="1555750"/>
+            <a:ext cx="774700" cy="88900"/>
+          </a:xfrm>
+          <a:prstGeom prst="rect">
+            <a:avLst/>
+          </a:prstGeom>
+          <a:noFill/>
+        </p:spPr>
+        <p:txBody>
+          <a:bodyPr wrap="square">
+            <a:spAutoFit/>
+          </a:bodyPr>
+          <a:lstStyle/>
+          <a:p>
+            <a:pPr algn="ctr"/>
+            <a:r>
+              <a:rPr sz="800" b="0" i="0">
+                <a:solidFill>
+                  <a:srgbClr val="999999"/>
+                </a:solidFill>
+                <a:latin typeface="Noto Sans KR"/>
+              </a:rPr>
+              <a:t>2030F</a:t>
+            </a:r>
+          </a:p>
+        </p:txBody>
+      </p:sp>
+      <p:sp>
+        <p:nvSpPr>
+          <p:cNvPr id="34" name="TextBox 33"/>
+          <p:cNvSpPr txBox="1"/>
+          <p:nvPr/>
+        </p:nvSpPr>
+        <p:spPr>
+          <a:xfrm>
+            <a:off x="5308600" y="1612900"/>
+            <a:ext cx="3365500" cy="76200"/>
+          </a:xfrm>
+          <a:prstGeom prst="rect">
+            <a:avLst/>
+          </a:prstGeom>
+          <a:noFill/>
+        </p:spPr>
+        <p:txBody>
+          <a:bodyPr wrap="square">
+            <a:spAutoFit/>
+          </a:bodyPr>
+          <a:lstStyle/>
+          <a:p>
+            <a:pPr algn="l"/>
+            <a:r>
+              <a:rPr sz="900" b="0" i="1">
+                <a:solidFill>
+                  <a:srgbClr val="AAAAAA"/>
+                </a:solidFill>
+                <a:latin typeface="Noto Sans KR"/>
+              </a:rPr>
+              <a:t>※ 2023년 실측치 34.5% / 2030F 40% 이상 전망</a:t>
+            </a:r>
+          </a:p>
+        </p:txBody>
+      </p:sp>
+      <p:sp>
+        <p:nvSpPr>
+          <p:cNvPr id="35" name="Rectangle 34"/>
+          <p:cNvSpPr/>
+          <p:nvPr/>
+        </p:nvSpPr>
+        <p:spPr>
+          <a:xfrm>
+            <a:off x="5245100" y="1765300"/>
+            <a:ext cx="3492500" cy="952500"/>
+          </a:xfrm>
+          <a:prstGeom prst="rect">
+            <a:avLst/>
+          </a:prstGeom>
+          <a:solidFill>
+            <a:srgbClr val="F8F8F8"/>
+          </a:solidFill>
+          <a:ln>
+            <a:noFill/>
+          </a:ln>
+        </p:spPr>
+        <p:style>
+          <a:lnRef idx="1">
+            <a:schemeClr val="accent1"/>
+          </a:lnRef>
+          <a:fillRef idx="3">
+            <a:schemeClr val="accent1"/>
+          </a:fillRef>
+          <a:effectRef idx="2">
+            <a:schemeClr val="accent1"/>
+          </a:effectRef>
+          <a:fontRef idx="minor">
+            <a:schemeClr val="lt1"/>
+          </a:fontRef>
+        </p:style>
+        <p:txBody>
+          <a:bodyPr rtlCol="0" anchor="ctr"/>
+          <a:lstStyle/>
+          <a:p>
+            <a:pPr algn="ctr"/>
+          </a:p>
+        </p:txBody>
+      </p:sp>
+      <p:sp>
+        <p:nvSpPr>
+          <p:cNvPr id="36" name="TextBox 35"/>
+          <p:cNvSpPr txBox="1"/>
+          <p:nvPr/>
+        </p:nvSpPr>
+        <p:spPr>
+          <a:xfrm>
+            <a:off x="5308600" y="1828800"/>
+            <a:ext cx="3365500" cy="88900"/>
+          </a:xfrm>
+          <a:prstGeom prst="rect">
+            <a:avLst/>
+          </a:prstGeom>
+          <a:noFill/>
+        </p:spPr>
+        <p:txBody>
+          <a:bodyPr wrap="square">
+            <a:spAutoFit/>
+          </a:bodyPr>
+          <a:lstStyle/>
+          <a:p>
+            <a:pPr algn="l"/>
+            <a:r>
+              <a:rPr sz="800" b="1" i="0">
+                <a:solidFill>
+                  <a:srgbClr val="999999"/>
+                </a:solidFill>
+                <a:latin typeface="Noto Sans KR"/>
+              </a:rPr>
+              <a:t>AI 입면 에너지 절감 효과 (국제 사례)</a:t>
+            </a:r>
+          </a:p>
+        </p:txBody>
+      </p:sp>
+      <p:sp>
+        <p:nvSpPr>
+          <p:cNvPr id="37" name="TextBox 36"/>
+          <p:cNvSpPr txBox="1"/>
+          <p:nvPr/>
+        </p:nvSpPr>
+        <p:spPr>
+          <a:xfrm>
+            <a:off x="5308600" y="1968500"/>
+            <a:ext cx="444500" cy="88900"/>
+          </a:xfrm>
+          <a:prstGeom prst="rect">
+            <a:avLst/>
+          </a:prstGeom>
+          <a:noFill/>
+        </p:spPr>
+        <p:txBody>
+          <a:bodyPr wrap="square">
+            <a:spAutoFit/>
+          </a:bodyPr>
+          <a:lstStyle/>
+          <a:p>
+            <a:pPr algn="l"/>
+            <a:r>
+              <a:rPr sz="800" b="0" i="0">
+                <a:solidFill>
+                  <a:srgbClr val="444444"/>
+                </a:solidFill>
+                <a:latin typeface="Noto Sans KR"/>
+              </a:rPr>
+              <a:t>기존 아파트</a:t>
+            </a:r>
+          </a:p>
+        </p:txBody>
+      </p:sp>
+      <p:sp>
+        <p:nvSpPr>
+          <p:cNvPr id="38" name="Rectangle 37"/>
+          <p:cNvSpPr/>
+          <p:nvPr/>
+        </p:nvSpPr>
+        <p:spPr>
+          <a:xfrm>
+            <a:off x="5778500" y="1981200"/>
+            <a:ext cx="2857500" cy="76200"/>
+          </a:xfrm>
+          <a:prstGeom prst="rect">
+            <a:avLst/>
+          </a:prstGeom>
+          <a:solidFill>
+            <a:srgbClr val="EFEFEF"/>
+          </a:solidFill>
+          <a:ln>
+            <a:noFill/>
+          </a:ln>
+        </p:spPr>
+        <p:style>
+          <a:lnRef idx="1">
+            <a:schemeClr val="accent1"/>
+          </a:lnRef>
+          <a:fillRef idx="3">
+            <a:schemeClr val="accent1"/>
+          </a:fillRef>
+          <a:effectRef idx="2">
+            <a:schemeClr val="accent1"/>
+          </a:effectRef>
+          <a:fontRef idx="minor">
+            <a:schemeClr val="lt1"/>
+          </a:fontRef>
+        </p:style>
+        <p:txBody>
+          <a:bodyPr rtlCol="0" anchor="ctr"/>
+          <a:lstStyle/>
+          <a:p>
+            <a:pPr algn="ctr"/>
+          </a:p>
+        </p:txBody>
+      </p:sp>
+      <p:sp>
+        <p:nvSpPr>
+          <p:cNvPr id="39" name="TextBox 38"/>
+          <p:cNvSpPr txBox="1"/>
+          <p:nvPr/>
+        </p:nvSpPr>
+        <p:spPr>
+          <a:xfrm>
+            <a:off x="8661400" y="1968500"/>
+            <a:ext cx="228600" cy="88900"/>
+          </a:xfrm>
+          <a:prstGeom prst="rect">
+            <a:avLst/>
+          </a:prstGeom>
+          <a:noFill/>
+        </p:spPr>
+        <p:txBody>
+          <a:bodyPr wrap="square">
+            <a:spAutoFit/>
+          </a:bodyPr>
+          <a:lstStyle/>
+          <a:p>
+            <a:pPr algn="l"/>
+            <a:r>
+              <a:rPr sz="800" b="0" i="0">
+                <a:solidFill>
+                  <a:srgbClr val="888888"/>
+                </a:solidFill>
+                <a:latin typeface="Noto Sans KR"/>
+              </a:rPr>
+              <a:t>-</a:t>
+            </a:r>
+          </a:p>
+        </p:txBody>
+      </p:sp>
+      <p:sp>
+        <p:nvSpPr>
+          <p:cNvPr id="40" name="TextBox 39"/>
+          <p:cNvSpPr txBox="1"/>
+          <p:nvPr/>
+        </p:nvSpPr>
+        <p:spPr>
+          <a:xfrm>
+            <a:off x="5308600" y="2108200"/>
+            <a:ext cx="444500" cy="88900"/>
+          </a:xfrm>
+          <a:prstGeom prst="rect">
+            <a:avLst/>
+          </a:prstGeom>
+          <a:noFill/>
+        </p:spPr>
+        <p:txBody>
+          <a:bodyPr wrap="square">
+            <a:spAutoFit/>
+          </a:bodyPr>
+          <a:lstStyle/>
+          <a:p>
+            <a:pPr algn="l"/>
+            <a:r>
+              <a:rPr sz="800" b="0" i="0">
+                <a:solidFill>
+                  <a:srgbClr val="444444"/>
+                </a:solidFill>
+                <a:latin typeface="Noto Sans KR"/>
+              </a:rPr>
+              <a:t>NEST (RL)</a:t>
+            </a:r>
+          </a:p>
+        </p:txBody>
+      </p:sp>
+      <p:sp>
+        <p:nvSpPr>
+          <p:cNvPr id="41" name="Rectangle 40"/>
+          <p:cNvSpPr/>
+          <p:nvPr/>
+        </p:nvSpPr>
+        <p:spPr>
+          <a:xfrm>
+            <a:off x="5778500" y="2120900"/>
+            <a:ext cx="2857500" cy="76200"/>
+          </a:xfrm>
+          <a:prstGeom prst="rect">
+            <a:avLst/>
+          </a:prstGeom>
+          <a:solidFill>
+            <a:srgbClr val="EFEFEF"/>
+          </a:solidFill>
+          <a:ln>
+            <a:noFill/>
+          </a:ln>
+        </p:spPr>
+        <p:style>
+          <a:lnRef idx="1">
+            <a:schemeClr val="accent1"/>
+          </a:lnRef>
+          <a:fillRef idx="3">
+            <a:schemeClr val="accent1"/>
+          </a:fillRef>
+          <a:effectRef idx="2">
+            <a:schemeClr val="accent1"/>
+          </a:effectRef>
+          <a:fontRef idx="minor">
+            <a:schemeClr val="lt1"/>
+          </a:fontRef>
+        </p:style>
+        <p:txBody>
+          <a:bodyPr rtlCol="0" anchor="ctr"/>
+          <a:lstStyle/>
+          <a:p>
+            <a:pPr algn="ctr"/>
+          </a:p>
+        </p:txBody>
+      </p:sp>
+      <p:sp>
+        <p:nvSpPr>
+          <p:cNvPr id="42" name="Rectangle 41"/>
+          <p:cNvSpPr/>
+          <p:nvPr/>
+        </p:nvSpPr>
+        <p:spPr>
+          <a:xfrm>
+            <a:off x="5778500" y="2120900"/>
+            <a:ext cx="742950" cy="76200"/>
           </a:xfrm>
           <a:prstGeom prst="rect">
             <a:avLst/>
@@ -4721,14 +5544,14 @@
       </p:sp>
       <p:sp>
         <p:nvSpPr>
-          <p:cNvPr id="24" name="TextBox 23"/>
+          <p:cNvPr id="43" name="TextBox 42"/>
           <p:cNvSpPr txBox="1"/>
           <p:nvPr/>
         </p:nvSpPr>
         <p:spPr>
           <a:xfrm>
-            <a:off x="5308600" y="1536700"/>
-            <a:ext cx="641350" cy="139700"/>
+            <a:off x="8661400" y="2108200"/>
+            <a:ext cx="228600" cy="88900"/>
           </a:xfrm>
           <a:prstGeom prst="rect">
             <a:avLst/>
@@ -4741,29 +5564,29 @@
           </a:bodyPr>
           <a:lstStyle/>
           <a:p>
-            <a:pPr algn="ctr"/>
+            <a:pPr algn="l"/>
             <a:r>
               <a:rPr sz="800" b="0" i="0">
                 <a:solidFill>
-                  <a:srgbClr val="999999"/>
-                </a:solidFill>
-                <a:latin typeface="Noto Sans KR"/>
-              </a:rPr>
-              <a:t>2015</a:t>
-            </a:r>
-          </a:p>
-        </p:txBody>
-      </p:sp>
-      <p:sp>
-        <p:nvSpPr>
-          <p:cNvPr id="25" name="TextBox 24"/>
+                  <a:srgbClr val="888888"/>
+                </a:solidFill>
+                <a:latin typeface="Noto Sans KR"/>
+              </a:rPr>
+              <a:t>26%</a:t>
+            </a:r>
+          </a:p>
+        </p:txBody>
+      </p:sp>
+      <p:sp>
+        <p:nvSpPr>
+          <p:cNvPr id="44" name="TextBox 43"/>
           <p:cNvSpPr txBox="1"/>
           <p:nvPr/>
         </p:nvSpPr>
         <p:spPr>
           <a:xfrm>
-            <a:off x="5988050" y="1270000"/>
-            <a:ext cx="641350" cy="82550"/>
+            <a:off x="5308600" y="2247900"/>
+            <a:ext cx="444500" cy="88900"/>
           </a:xfrm>
           <a:prstGeom prst="rect">
             <a:avLst/>
@@ -4776,7 +5599,7 @@
           </a:bodyPr>
           <a:lstStyle/>
           <a:p>
-            <a:pPr algn="ctr"/>
+            <a:pPr algn="l"/>
             <a:r>
               <a:rPr sz="800" b="0" i="0">
                 <a:solidFill>
@@ -4784,27 +5607,27 @@
                 </a:solidFill>
                 <a:latin typeface="Noto Sans KR"/>
               </a:rPr>
-              <a:t>29%</a:t>
-            </a:r>
-          </a:p>
-        </p:txBody>
-      </p:sp>
-      <p:sp>
-        <p:nvSpPr>
-          <p:cNvPr id="26" name="Rectangle 25"/>
+              <a:t>Al Bahar</a:t>
+            </a:r>
+          </a:p>
+        </p:txBody>
+      </p:sp>
+      <p:sp>
+        <p:nvSpPr>
+          <p:cNvPr id="45" name="Rectangle 44"/>
           <p:cNvSpPr/>
           <p:nvPr/>
         </p:nvSpPr>
         <p:spPr>
           <a:xfrm>
-            <a:off x="5988050" y="1358900"/>
-            <a:ext cx="641350" cy="165100"/>
+            <a:off x="5778500" y="2260600"/>
+            <a:ext cx="2857500" cy="76200"/>
           </a:xfrm>
           <a:prstGeom prst="rect">
             <a:avLst/>
           </a:prstGeom>
           <a:solidFill>
-            <a:srgbClr val="AAAAAA"/>
+            <a:srgbClr val="EFEFEF"/>
           </a:solidFill>
           <a:ln>
             <a:noFill/>
@@ -4834,84 +5657,14 @@
       </p:sp>
       <p:sp>
         <p:nvSpPr>
-          <p:cNvPr id="27" name="TextBox 26"/>
-          <p:cNvSpPr txBox="1"/>
-          <p:nvPr/>
-        </p:nvSpPr>
-        <p:spPr>
-          <a:xfrm>
-            <a:off x="5988050" y="1536700"/>
-            <a:ext cx="641350" cy="139700"/>
-          </a:xfrm>
-          <a:prstGeom prst="rect">
-            <a:avLst/>
-          </a:prstGeom>
-          <a:noFill/>
-        </p:spPr>
-        <p:txBody>
-          <a:bodyPr wrap="square">
-            <a:spAutoFit/>
-          </a:bodyPr>
-          <a:lstStyle/>
-          <a:p>
-            <a:pPr algn="ctr"/>
-            <a:r>
-              <a:rPr sz="800" b="0" i="0">
-                <a:solidFill>
-                  <a:srgbClr val="999999"/>
-                </a:solidFill>
-                <a:latin typeface="Noto Sans KR"/>
-              </a:rPr>
-              <a:t>2018</a:t>
-            </a:r>
-          </a:p>
-        </p:txBody>
-      </p:sp>
-      <p:sp>
-        <p:nvSpPr>
-          <p:cNvPr id="28" name="TextBox 27"/>
-          <p:cNvSpPr txBox="1"/>
-          <p:nvPr/>
-        </p:nvSpPr>
-        <p:spPr>
-          <a:xfrm>
-            <a:off x="6667500" y="1257300"/>
-            <a:ext cx="641350" cy="82550"/>
-          </a:xfrm>
-          <a:prstGeom prst="rect">
-            <a:avLst/>
-          </a:prstGeom>
-          <a:noFill/>
-        </p:spPr>
-        <p:txBody>
-          <a:bodyPr wrap="square">
-            <a:spAutoFit/>
-          </a:bodyPr>
-          <a:lstStyle/>
-          <a:p>
-            <a:pPr algn="ctr"/>
-            <a:r>
-              <a:rPr sz="800" b="0" i="0">
-                <a:solidFill>
-                  <a:srgbClr val="333333"/>
-                </a:solidFill>
-                <a:latin typeface="Noto Sans KR"/>
-              </a:rPr>
-              <a:t>32%</a:t>
-            </a:r>
-          </a:p>
-        </p:txBody>
-      </p:sp>
-      <p:sp>
-        <p:nvSpPr>
-          <p:cNvPr id="29" name="Rectangle 28"/>
+          <p:cNvPr id="46" name="Rectangle 45"/>
           <p:cNvSpPr/>
           <p:nvPr/>
         </p:nvSpPr>
         <p:spPr>
           <a:xfrm>
-            <a:off x="6667500" y="1346200"/>
-            <a:ext cx="641350" cy="177800"/>
+            <a:off x="5778500" y="2260600"/>
+            <a:ext cx="1428750" cy="76200"/>
           </a:xfrm>
           <a:prstGeom prst="rect">
             <a:avLst/>
@@ -4947,14 +5700,14 @@
       </p:sp>
       <p:sp>
         <p:nvSpPr>
-          <p:cNvPr id="30" name="TextBox 29"/>
+          <p:cNvPr id="47" name="TextBox 46"/>
           <p:cNvSpPr txBox="1"/>
           <p:nvPr/>
         </p:nvSpPr>
         <p:spPr>
           <a:xfrm>
-            <a:off x="6667500" y="1536700"/>
-            <a:ext cx="641350" cy="139700"/>
+            <a:off x="8661400" y="2247900"/>
+            <a:ext cx="228600" cy="88900"/>
           </a:xfrm>
           <a:prstGeom prst="rect">
             <a:avLst/>
@@ -4967,29 +5720,29 @@
           </a:bodyPr>
           <a:lstStyle/>
           <a:p>
-            <a:pPr algn="ctr"/>
+            <a:pPr algn="l"/>
             <a:r>
               <a:rPr sz="800" b="0" i="0">
                 <a:solidFill>
-                  <a:srgbClr val="999999"/>
-                </a:solidFill>
-                <a:latin typeface="Noto Sans KR"/>
-              </a:rPr>
-              <a:t>2020</a:t>
-            </a:r>
-          </a:p>
-        </p:txBody>
-      </p:sp>
-      <p:sp>
-        <p:nvSpPr>
-          <p:cNvPr id="31" name="TextBox 30"/>
+                  <a:srgbClr val="888888"/>
+                </a:solidFill>
+                <a:latin typeface="Noto Sans KR"/>
+              </a:rPr>
+              <a:t>50%</a:t>
+            </a:r>
+          </a:p>
+        </p:txBody>
+      </p:sp>
+      <p:sp>
+        <p:nvSpPr>
+          <p:cNvPr id="48" name="TextBox 47"/>
           <p:cNvSpPr txBox="1"/>
           <p:nvPr/>
         </p:nvSpPr>
         <p:spPr>
           <a:xfrm>
-            <a:off x="7346950" y="1238250"/>
-            <a:ext cx="641350" cy="82550"/>
+            <a:off x="5308600" y="2387600"/>
+            <a:ext cx="444500" cy="88900"/>
           </a:xfrm>
           <a:prstGeom prst="rect">
             <a:avLst/>
@@ -5002,29 +5755,72 @@
           </a:bodyPr>
           <a:lstStyle/>
           <a:p>
+            <a:pPr algn="l"/>
+            <a:r>
+              <a:rPr sz="800" b="0" i="0">
+                <a:solidFill>
+                  <a:srgbClr val="444444"/>
+                </a:solidFill>
+                <a:latin typeface="Noto Sans KR"/>
+              </a:rPr>
+              <a:t>The Edge</a:t>
+            </a:r>
+          </a:p>
+        </p:txBody>
+      </p:sp>
+      <p:sp>
+        <p:nvSpPr>
+          <p:cNvPr id="49" name="Rectangle 48"/>
+          <p:cNvSpPr/>
+          <p:nvPr/>
+        </p:nvSpPr>
+        <p:spPr>
+          <a:xfrm>
+            <a:off x="5778500" y="2400300"/>
+            <a:ext cx="2857500" cy="76200"/>
+          </a:xfrm>
+          <a:prstGeom prst="rect">
+            <a:avLst/>
+          </a:prstGeom>
+          <a:solidFill>
+            <a:srgbClr val="EFEFEF"/>
+          </a:solidFill>
+          <a:ln>
+            <a:noFill/>
+          </a:ln>
+        </p:spPr>
+        <p:style>
+          <a:lnRef idx="1">
+            <a:schemeClr val="accent1"/>
+          </a:lnRef>
+          <a:fillRef idx="3">
+            <a:schemeClr val="accent1"/>
+          </a:fillRef>
+          <a:effectRef idx="2">
+            <a:schemeClr val="accent1"/>
+          </a:effectRef>
+          <a:fontRef idx="minor">
+            <a:schemeClr val="lt1"/>
+          </a:fontRef>
+        </p:style>
+        <p:txBody>
+          <a:bodyPr rtlCol="0" anchor="ctr"/>
+          <a:lstStyle/>
+          <a:p>
             <a:pPr algn="ctr"/>
-            <a:r>
-              <a:rPr sz="800" b="0" i="0">
-                <a:solidFill>
-                  <a:srgbClr val="333333"/>
-                </a:solidFill>
-                <a:latin typeface="Noto Sans KR"/>
-              </a:rPr>
-              <a:t>35%</a:t>
-            </a:r>
-          </a:p>
-        </p:txBody>
-      </p:sp>
-      <p:sp>
-        <p:nvSpPr>
-          <p:cNvPr id="32" name="Rectangle 31"/>
+          </a:p>
+        </p:txBody>
+      </p:sp>
+      <p:sp>
+        <p:nvSpPr>
+          <p:cNvPr id="50" name="Rectangle 49"/>
           <p:cNvSpPr/>
           <p:nvPr/>
         </p:nvSpPr>
         <p:spPr>
           <a:xfrm>
-            <a:off x="7346950" y="1327150"/>
-            <a:ext cx="641350" cy="196850"/>
+            <a:off x="5778500" y="2400300"/>
+            <a:ext cx="2000250" cy="76200"/>
           </a:xfrm>
           <a:prstGeom prst="rect">
             <a:avLst/>
@@ -5060,14 +5856,14 @@
       </p:sp>
       <p:sp>
         <p:nvSpPr>
-          <p:cNvPr id="33" name="TextBox 32"/>
+          <p:cNvPr id="51" name="TextBox 50"/>
           <p:cNvSpPr txBox="1"/>
           <p:nvPr/>
         </p:nvSpPr>
         <p:spPr>
           <a:xfrm>
-            <a:off x="7346950" y="1536700"/>
-            <a:ext cx="641350" cy="139700"/>
+            <a:off x="8661400" y="2387600"/>
+            <a:ext cx="228600" cy="88900"/>
           </a:xfrm>
           <a:prstGeom prst="rect">
             <a:avLst/>
@@ -5080,29 +5876,29 @@
           </a:bodyPr>
           <a:lstStyle/>
           <a:p>
-            <a:pPr algn="ctr"/>
+            <a:pPr algn="l"/>
             <a:r>
               <a:rPr sz="800" b="0" i="0">
                 <a:solidFill>
-                  <a:srgbClr val="999999"/>
-                </a:solidFill>
-                <a:latin typeface="Noto Sans KR"/>
-              </a:rPr>
-              <a:t>2023</a:t>
-            </a:r>
-          </a:p>
-        </p:txBody>
-      </p:sp>
-      <p:sp>
-        <p:nvSpPr>
-          <p:cNvPr id="34" name="TextBox 33"/>
+                  <a:srgbClr val="888888"/>
+                </a:solidFill>
+                <a:latin typeface="Noto Sans KR"/>
+              </a:rPr>
+              <a:t>70%</a:t>
+            </a:r>
+          </a:p>
+        </p:txBody>
+      </p:sp>
+      <p:sp>
+        <p:nvSpPr>
+          <p:cNvPr id="52" name="TextBox 51"/>
           <p:cNvSpPr txBox="1"/>
           <p:nvPr/>
         </p:nvSpPr>
         <p:spPr>
           <a:xfrm>
-            <a:off x="8026400" y="1206500"/>
-            <a:ext cx="641350" cy="82550"/>
+            <a:off x="5308600" y="2527300"/>
+            <a:ext cx="444500" cy="88900"/>
           </a:xfrm>
           <a:prstGeom prst="rect">
             <a:avLst/>
@@ -5115,255 +5911,28 @@
           </a:bodyPr>
           <a:lstStyle/>
           <a:p>
-            <a:pPr algn="ctr"/>
+            <a:pPr algn="l"/>
             <a:r>
               <a:rPr sz="800" b="1" i="0">
                 <a:solidFill>
-                  <a:srgbClr val="CC0000"/>
-                </a:solidFill>
-                <a:latin typeface="Noto Sans KR"/>
-              </a:rPr>
-              <a:t>40%</a:t>
-            </a:r>
-          </a:p>
-        </p:txBody>
-      </p:sp>
-      <p:sp>
-        <p:nvSpPr>
-          <p:cNvPr id="35" name="Rectangle 34"/>
+                  <a:srgbClr val="111111"/>
+                </a:solidFill>
+                <a:latin typeface="Noto Sans KR"/>
+              </a:rPr>
+              <a:t>HouseZero</a:t>
+            </a:r>
+          </a:p>
+        </p:txBody>
+      </p:sp>
+      <p:sp>
+        <p:nvSpPr>
+          <p:cNvPr id="53" name="Rectangle 52"/>
           <p:cNvSpPr/>
           <p:nvPr/>
         </p:nvSpPr>
         <p:spPr>
           <a:xfrm>
-            <a:off x="8026400" y="1295400"/>
-            <a:ext cx="641350" cy="228600"/>
-          </a:xfrm>
-          <a:prstGeom prst="rect">
-            <a:avLst/>
-          </a:prstGeom>
-          <a:solidFill>
-            <a:srgbClr val="CC0000"/>
-          </a:solidFill>
-          <a:ln>
-            <a:noFill/>
-          </a:ln>
-        </p:spPr>
-        <p:style>
-          <a:lnRef idx="1">
-            <a:schemeClr val="accent1"/>
-          </a:lnRef>
-          <a:fillRef idx="3">
-            <a:schemeClr val="accent1"/>
-          </a:fillRef>
-          <a:effectRef idx="2">
-            <a:schemeClr val="accent1"/>
-          </a:effectRef>
-          <a:fontRef idx="minor">
-            <a:schemeClr val="lt1"/>
-          </a:fontRef>
-        </p:style>
-        <p:txBody>
-          <a:bodyPr rtlCol="0" anchor="ctr"/>
-          <a:lstStyle/>
-          <a:p>
-            <a:pPr algn="ctr"/>
-          </a:p>
-        </p:txBody>
-      </p:sp>
-      <p:sp>
-        <p:nvSpPr>
-          <p:cNvPr id="36" name="TextBox 35"/>
-          <p:cNvSpPr txBox="1"/>
-          <p:nvPr/>
-        </p:nvSpPr>
-        <p:spPr>
-          <a:xfrm>
-            <a:off x="8026400" y="1536700"/>
-            <a:ext cx="641350" cy="139700"/>
-          </a:xfrm>
-          <a:prstGeom prst="rect">
-            <a:avLst/>
-          </a:prstGeom>
-          <a:noFill/>
-        </p:spPr>
-        <p:txBody>
-          <a:bodyPr wrap="square">
-            <a:spAutoFit/>
-          </a:bodyPr>
-          <a:lstStyle/>
-          <a:p>
-            <a:pPr algn="ctr"/>
-            <a:r>
-              <a:rPr sz="800" b="0" i="0">
-                <a:solidFill>
-                  <a:srgbClr val="999999"/>
-                </a:solidFill>
-                <a:latin typeface="Noto Sans KR"/>
-              </a:rPr>
-              <a:t>2030
-예상</a:t>
-            </a:r>
-          </a:p>
-        </p:txBody>
-      </p:sp>
-      <p:sp>
-        <p:nvSpPr>
-          <p:cNvPr id="37" name="TextBox 36"/>
-          <p:cNvSpPr txBox="1"/>
-          <p:nvPr/>
-        </p:nvSpPr>
-        <p:spPr>
-          <a:xfrm>
-            <a:off x="5308600" y="1587500"/>
-            <a:ext cx="3365500" cy="88900"/>
-          </a:xfrm>
-          <a:prstGeom prst="rect">
-            <a:avLst/>
-          </a:prstGeom>
-          <a:noFill/>
-        </p:spPr>
-        <p:txBody>
-          <a:bodyPr wrap="square">
-            <a:spAutoFit/>
-          </a:bodyPr>
-          <a:lstStyle/>
-          <a:p>
-            <a:pPr algn="l"/>
-            <a:r>
-              <a:rPr sz="900" b="0" i="1">
-                <a:solidFill>
-                  <a:srgbClr val="AAAAAA"/>
-                </a:solidFill>
-                <a:latin typeface="Noto Sans KR"/>
-              </a:rPr>
-              <a:t>2030년 40% 돌파 전망 (통계청)</a:t>
-            </a:r>
-          </a:p>
-        </p:txBody>
-      </p:sp>
-      <p:sp>
-        <p:nvSpPr>
-          <p:cNvPr id="38" name="Rectangle 37"/>
-          <p:cNvSpPr/>
-          <p:nvPr/>
-        </p:nvSpPr>
-        <p:spPr>
-          <a:xfrm>
-            <a:off x="5245100" y="1739900"/>
-            <a:ext cx="3492500" cy="952500"/>
-          </a:xfrm>
-          <a:prstGeom prst="rect">
-            <a:avLst/>
-          </a:prstGeom>
-          <a:solidFill>
-            <a:srgbClr val="F8F8F8"/>
-          </a:solidFill>
-          <a:ln>
-            <a:noFill/>
-          </a:ln>
-        </p:spPr>
-        <p:style>
-          <a:lnRef idx="1">
-            <a:schemeClr val="accent1"/>
-          </a:lnRef>
-          <a:fillRef idx="3">
-            <a:schemeClr val="accent1"/>
-          </a:fillRef>
-          <a:effectRef idx="2">
-            <a:schemeClr val="accent1"/>
-          </a:effectRef>
-          <a:fontRef idx="minor">
-            <a:schemeClr val="lt1"/>
-          </a:fontRef>
-        </p:style>
-        <p:txBody>
-          <a:bodyPr rtlCol="0" anchor="ctr"/>
-          <a:lstStyle/>
-          <a:p>
-            <a:pPr algn="ctr"/>
-          </a:p>
-        </p:txBody>
-      </p:sp>
-      <p:sp>
-        <p:nvSpPr>
-          <p:cNvPr id="39" name="TextBox 38"/>
-          <p:cNvSpPr txBox="1"/>
-          <p:nvPr/>
-        </p:nvSpPr>
-        <p:spPr>
-          <a:xfrm>
-            <a:off x="5308600" y="1803400"/>
-            <a:ext cx="3365500" cy="88900"/>
-          </a:xfrm>
-          <a:prstGeom prst="rect">
-            <a:avLst/>
-          </a:prstGeom>
-          <a:noFill/>
-        </p:spPr>
-        <p:txBody>
-          <a:bodyPr wrap="square">
-            <a:spAutoFit/>
-          </a:bodyPr>
-          <a:lstStyle/>
-          <a:p>
-            <a:pPr algn="l"/>
-            <a:r>
-              <a:rPr sz="800" b="1" i="0">
-                <a:solidFill>
-                  <a:srgbClr val="999999"/>
-                </a:solidFill>
-                <a:latin typeface="Noto Sans KR"/>
-              </a:rPr>
-              <a:t>AI 입면 에너지 절감 효과 (국제 사례)</a:t>
-            </a:r>
-          </a:p>
-        </p:txBody>
-      </p:sp>
-      <p:sp>
-        <p:nvSpPr>
-          <p:cNvPr id="40" name="TextBox 39"/>
-          <p:cNvSpPr txBox="1"/>
-          <p:nvPr/>
-        </p:nvSpPr>
-        <p:spPr>
-          <a:xfrm>
-            <a:off x="5308600" y="1943100"/>
-            <a:ext cx="444500" cy="88900"/>
-          </a:xfrm>
-          <a:prstGeom prst="rect">
-            <a:avLst/>
-          </a:prstGeom>
-          <a:noFill/>
-        </p:spPr>
-        <p:txBody>
-          <a:bodyPr wrap="square">
-            <a:spAutoFit/>
-          </a:bodyPr>
-          <a:lstStyle/>
-          <a:p>
-            <a:pPr algn="l"/>
-            <a:r>
-              <a:rPr sz="800" b="0" i="0">
-                <a:solidFill>
-                  <a:srgbClr val="444444"/>
-                </a:solidFill>
-                <a:latin typeface="Noto Sans KR"/>
-              </a:rPr>
-              <a:t>기존 아파트</a:t>
-            </a:r>
-          </a:p>
-        </p:txBody>
-      </p:sp>
-      <p:sp>
-        <p:nvSpPr>
-          <p:cNvPr id="41" name="Rectangle 40"/>
-          <p:cNvSpPr/>
-          <p:nvPr/>
-        </p:nvSpPr>
-        <p:spPr>
-          <a:xfrm>
-            <a:off x="5778500" y="1955800"/>
+            <a:off x="5778500" y="2540000"/>
             <a:ext cx="2857500" cy="76200"/>
           </a:xfrm>
           <a:prstGeom prst="rect">
@@ -5400,594 +5969,13 @@
       </p:sp>
       <p:sp>
         <p:nvSpPr>
-          <p:cNvPr id="42" name="TextBox 41"/>
-          <p:cNvSpPr txBox="1"/>
-          <p:nvPr/>
-        </p:nvSpPr>
-        <p:spPr>
-          <a:xfrm>
-            <a:off x="8661400" y="1943100"/>
-            <a:ext cx="228600" cy="88900"/>
-          </a:xfrm>
-          <a:prstGeom prst="rect">
-            <a:avLst/>
-          </a:prstGeom>
-          <a:noFill/>
-        </p:spPr>
-        <p:txBody>
-          <a:bodyPr wrap="square">
-            <a:spAutoFit/>
-          </a:bodyPr>
-          <a:lstStyle/>
-          <a:p>
-            <a:pPr algn="l"/>
-            <a:r>
-              <a:rPr sz="800" b="0" i="0">
-                <a:solidFill>
-                  <a:srgbClr val="888888"/>
-                </a:solidFill>
-                <a:latin typeface="Noto Sans KR"/>
-              </a:rPr>
-              <a:t>-</a:t>
-            </a:r>
-          </a:p>
-        </p:txBody>
-      </p:sp>
-      <p:sp>
-        <p:nvSpPr>
-          <p:cNvPr id="43" name="TextBox 42"/>
-          <p:cNvSpPr txBox="1"/>
-          <p:nvPr/>
-        </p:nvSpPr>
-        <p:spPr>
-          <a:xfrm>
-            <a:off x="5308600" y="2082800"/>
-            <a:ext cx="444500" cy="88900"/>
-          </a:xfrm>
-          <a:prstGeom prst="rect">
-            <a:avLst/>
-          </a:prstGeom>
-          <a:noFill/>
-        </p:spPr>
-        <p:txBody>
-          <a:bodyPr wrap="square">
-            <a:spAutoFit/>
-          </a:bodyPr>
-          <a:lstStyle/>
-          <a:p>
-            <a:pPr algn="l"/>
-            <a:r>
-              <a:rPr sz="800" b="0" i="0">
-                <a:solidFill>
-                  <a:srgbClr val="444444"/>
-                </a:solidFill>
-                <a:latin typeface="Noto Sans KR"/>
-              </a:rPr>
-              <a:t>NEST (RL)</a:t>
-            </a:r>
-          </a:p>
-        </p:txBody>
-      </p:sp>
-      <p:sp>
-        <p:nvSpPr>
-          <p:cNvPr id="44" name="Rectangle 43"/>
+          <p:cNvPr id="54" name="Rectangle 53"/>
           <p:cNvSpPr/>
           <p:nvPr/>
         </p:nvSpPr>
         <p:spPr>
           <a:xfrm>
-            <a:off x="5778500" y="2095500"/>
-            <a:ext cx="2857500" cy="76200"/>
-          </a:xfrm>
-          <a:prstGeom prst="rect">
-            <a:avLst/>
-          </a:prstGeom>
-          <a:solidFill>
-            <a:srgbClr val="EFEFEF"/>
-          </a:solidFill>
-          <a:ln>
-            <a:noFill/>
-          </a:ln>
-        </p:spPr>
-        <p:style>
-          <a:lnRef idx="1">
-            <a:schemeClr val="accent1"/>
-          </a:lnRef>
-          <a:fillRef idx="3">
-            <a:schemeClr val="accent1"/>
-          </a:fillRef>
-          <a:effectRef idx="2">
-            <a:schemeClr val="accent1"/>
-          </a:effectRef>
-          <a:fontRef idx="minor">
-            <a:schemeClr val="lt1"/>
-          </a:fontRef>
-        </p:style>
-        <p:txBody>
-          <a:bodyPr rtlCol="0" anchor="ctr"/>
-          <a:lstStyle/>
-          <a:p>
-            <a:pPr algn="ctr"/>
-          </a:p>
-        </p:txBody>
-      </p:sp>
-      <p:sp>
-        <p:nvSpPr>
-          <p:cNvPr id="45" name="Rectangle 44"/>
-          <p:cNvSpPr/>
-          <p:nvPr/>
-        </p:nvSpPr>
-        <p:spPr>
-          <a:xfrm>
-            <a:off x="5778500" y="2095500"/>
-            <a:ext cx="742950" cy="76200"/>
-          </a:xfrm>
-          <a:prstGeom prst="rect">
-            <a:avLst/>
-          </a:prstGeom>
-          <a:solidFill>
-            <a:srgbClr val="BBBBBB"/>
-          </a:solidFill>
-          <a:ln>
-            <a:noFill/>
-          </a:ln>
-        </p:spPr>
-        <p:style>
-          <a:lnRef idx="1">
-            <a:schemeClr val="accent1"/>
-          </a:lnRef>
-          <a:fillRef idx="3">
-            <a:schemeClr val="accent1"/>
-          </a:fillRef>
-          <a:effectRef idx="2">
-            <a:schemeClr val="accent1"/>
-          </a:effectRef>
-          <a:fontRef idx="minor">
-            <a:schemeClr val="lt1"/>
-          </a:fontRef>
-        </p:style>
-        <p:txBody>
-          <a:bodyPr rtlCol="0" anchor="ctr"/>
-          <a:lstStyle/>
-          <a:p>
-            <a:pPr algn="ctr"/>
-          </a:p>
-        </p:txBody>
-      </p:sp>
-      <p:sp>
-        <p:nvSpPr>
-          <p:cNvPr id="46" name="TextBox 45"/>
-          <p:cNvSpPr txBox="1"/>
-          <p:nvPr/>
-        </p:nvSpPr>
-        <p:spPr>
-          <a:xfrm>
-            <a:off x="8661400" y="2082800"/>
-            <a:ext cx="228600" cy="88900"/>
-          </a:xfrm>
-          <a:prstGeom prst="rect">
-            <a:avLst/>
-          </a:prstGeom>
-          <a:noFill/>
-        </p:spPr>
-        <p:txBody>
-          <a:bodyPr wrap="square">
-            <a:spAutoFit/>
-          </a:bodyPr>
-          <a:lstStyle/>
-          <a:p>
-            <a:pPr algn="l"/>
-            <a:r>
-              <a:rPr sz="800" b="0" i="0">
-                <a:solidFill>
-                  <a:srgbClr val="888888"/>
-                </a:solidFill>
-                <a:latin typeface="Noto Sans KR"/>
-              </a:rPr>
-              <a:t>26%</a:t>
-            </a:r>
-          </a:p>
-        </p:txBody>
-      </p:sp>
-      <p:sp>
-        <p:nvSpPr>
-          <p:cNvPr id="47" name="TextBox 46"/>
-          <p:cNvSpPr txBox="1"/>
-          <p:nvPr/>
-        </p:nvSpPr>
-        <p:spPr>
-          <a:xfrm>
-            <a:off x="5308600" y="2222500"/>
-            <a:ext cx="444500" cy="88900"/>
-          </a:xfrm>
-          <a:prstGeom prst="rect">
-            <a:avLst/>
-          </a:prstGeom>
-          <a:noFill/>
-        </p:spPr>
-        <p:txBody>
-          <a:bodyPr wrap="square">
-            <a:spAutoFit/>
-          </a:bodyPr>
-          <a:lstStyle/>
-          <a:p>
-            <a:pPr algn="l"/>
-            <a:r>
-              <a:rPr sz="800" b="0" i="0">
-                <a:solidFill>
-                  <a:srgbClr val="444444"/>
-                </a:solidFill>
-                <a:latin typeface="Noto Sans KR"/>
-              </a:rPr>
-              <a:t>Al Bahar</a:t>
-            </a:r>
-          </a:p>
-        </p:txBody>
-      </p:sp>
-      <p:sp>
-        <p:nvSpPr>
-          <p:cNvPr id="48" name="Rectangle 47"/>
-          <p:cNvSpPr/>
-          <p:nvPr/>
-        </p:nvSpPr>
-        <p:spPr>
-          <a:xfrm>
-            <a:off x="5778500" y="2235200"/>
-            <a:ext cx="2857500" cy="76200"/>
-          </a:xfrm>
-          <a:prstGeom prst="rect">
-            <a:avLst/>
-          </a:prstGeom>
-          <a:solidFill>
-            <a:srgbClr val="EFEFEF"/>
-          </a:solidFill>
-          <a:ln>
-            <a:noFill/>
-          </a:ln>
-        </p:spPr>
-        <p:style>
-          <a:lnRef idx="1">
-            <a:schemeClr val="accent1"/>
-          </a:lnRef>
-          <a:fillRef idx="3">
-            <a:schemeClr val="accent1"/>
-          </a:fillRef>
-          <a:effectRef idx="2">
-            <a:schemeClr val="accent1"/>
-          </a:effectRef>
-          <a:fontRef idx="minor">
-            <a:schemeClr val="lt1"/>
-          </a:fontRef>
-        </p:style>
-        <p:txBody>
-          <a:bodyPr rtlCol="0" anchor="ctr"/>
-          <a:lstStyle/>
-          <a:p>
-            <a:pPr algn="ctr"/>
-          </a:p>
-        </p:txBody>
-      </p:sp>
-      <p:sp>
-        <p:nvSpPr>
-          <p:cNvPr id="49" name="Rectangle 48"/>
-          <p:cNvSpPr/>
-          <p:nvPr/>
-        </p:nvSpPr>
-        <p:spPr>
-          <a:xfrm>
-            <a:off x="5778500" y="2235200"/>
-            <a:ext cx="1428750" cy="76200"/>
-          </a:xfrm>
-          <a:prstGeom prst="rect">
-            <a:avLst/>
-          </a:prstGeom>
-          <a:solidFill>
-            <a:srgbClr val="888888"/>
-          </a:solidFill>
-          <a:ln>
-            <a:noFill/>
-          </a:ln>
-        </p:spPr>
-        <p:style>
-          <a:lnRef idx="1">
-            <a:schemeClr val="accent1"/>
-          </a:lnRef>
-          <a:fillRef idx="3">
-            <a:schemeClr val="accent1"/>
-          </a:fillRef>
-          <a:effectRef idx="2">
-            <a:schemeClr val="accent1"/>
-          </a:effectRef>
-          <a:fontRef idx="minor">
-            <a:schemeClr val="lt1"/>
-          </a:fontRef>
-        </p:style>
-        <p:txBody>
-          <a:bodyPr rtlCol="0" anchor="ctr"/>
-          <a:lstStyle/>
-          <a:p>
-            <a:pPr algn="ctr"/>
-          </a:p>
-        </p:txBody>
-      </p:sp>
-      <p:sp>
-        <p:nvSpPr>
-          <p:cNvPr id="50" name="TextBox 49"/>
-          <p:cNvSpPr txBox="1"/>
-          <p:nvPr/>
-        </p:nvSpPr>
-        <p:spPr>
-          <a:xfrm>
-            <a:off x="8661400" y="2222500"/>
-            <a:ext cx="228600" cy="88900"/>
-          </a:xfrm>
-          <a:prstGeom prst="rect">
-            <a:avLst/>
-          </a:prstGeom>
-          <a:noFill/>
-        </p:spPr>
-        <p:txBody>
-          <a:bodyPr wrap="square">
-            <a:spAutoFit/>
-          </a:bodyPr>
-          <a:lstStyle/>
-          <a:p>
-            <a:pPr algn="l"/>
-            <a:r>
-              <a:rPr sz="800" b="0" i="0">
-                <a:solidFill>
-                  <a:srgbClr val="888888"/>
-                </a:solidFill>
-                <a:latin typeface="Noto Sans KR"/>
-              </a:rPr>
-              <a:t>50%</a:t>
-            </a:r>
-          </a:p>
-        </p:txBody>
-      </p:sp>
-      <p:sp>
-        <p:nvSpPr>
-          <p:cNvPr id="51" name="TextBox 50"/>
-          <p:cNvSpPr txBox="1"/>
-          <p:nvPr/>
-        </p:nvSpPr>
-        <p:spPr>
-          <a:xfrm>
-            <a:off x="5308600" y="2362200"/>
-            <a:ext cx="444500" cy="88900"/>
-          </a:xfrm>
-          <a:prstGeom prst="rect">
-            <a:avLst/>
-          </a:prstGeom>
-          <a:noFill/>
-        </p:spPr>
-        <p:txBody>
-          <a:bodyPr wrap="square">
-            <a:spAutoFit/>
-          </a:bodyPr>
-          <a:lstStyle/>
-          <a:p>
-            <a:pPr algn="l"/>
-            <a:r>
-              <a:rPr sz="800" b="0" i="0">
-                <a:solidFill>
-                  <a:srgbClr val="444444"/>
-                </a:solidFill>
-                <a:latin typeface="Noto Sans KR"/>
-              </a:rPr>
-              <a:t>The Edge</a:t>
-            </a:r>
-          </a:p>
-        </p:txBody>
-      </p:sp>
-      <p:sp>
-        <p:nvSpPr>
-          <p:cNvPr id="52" name="Rectangle 51"/>
-          <p:cNvSpPr/>
-          <p:nvPr/>
-        </p:nvSpPr>
-        <p:spPr>
-          <a:xfrm>
-            <a:off x="5778500" y="2374900"/>
-            <a:ext cx="2857500" cy="76200"/>
-          </a:xfrm>
-          <a:prstGeom prst="rect">
-            <a:avLst/>
-          </a:prstGeom>
-          <a:solidFill>
-            <a:srgbClr val="EFEFEF"/>
-          </a:solidFill>
-          <a:ln>
-            <a:noFill/>
-          </a:ln>
-        </p:spPr>
-        <p:style>
-          <a:lnRef idx="1">
-            <a:schemeClr val="accent1"/>
-          </a:lnRef>
-          <a:fillRef idx="3">
-            <a:schemeClr val="accent1"/>
-          </a:fillRef>
-          <a:effectRef idx="2">
-            <a:schemeClr val="accent1"/>
-          </a:effectRef>
-          <a:fontRef idx="minor">
-            <a:schemeClr val="lt1"/>
-          </a:fontRef>
-        </p:style>
-        <p:txBody>
-          <a:bodyPr rtlCol="0" anchor="ctr"/>
-          <a:lstStyle/>
-          <a:p>
-            <a:pPr algn="ctr"/>
-          </a:p>
-        </p:txBody>
-      </p:sp>
-      <p:sp>
-        <p:nvSpPr>
-          <p:cNvPr id="53" name="Rectangle 52"/>
-          <p:cNvSpPr/>
-          <p:nvPr/>
-        </p:nvSpPr>
-        <p:spPr>
-          <a:xfrm>
-            <a:off x="5778500" y="2374900"/>
-            <a:ext cx="2000250" cy="76200"/>
-          </a:xfrm>
-          <a:prstGeom prst="rect">
-            <a:avLst/>
-          </a:prstGeom>
-          <a:solidFill>
-            <a:srgbClr val="555555"/>
-          </a:solidFill>
-          <a:ln>
-            <a:noFill/>
-          </a:ln>
-        </p:spPr>
-        <p:style>
-          <a:lnRef idx="1">
-            <a:schemeClr val="accent1"/>
-          </a:lnRef>
-          <a:fillRef idx="3">
-            <a:schemeClr val="accent1"/>
-          </a:fillRef>
-          <a:effectRef idx="2">
-            <a:schemeClr val="accent1"/>
-          </a:effectRef>
-          <a:fontRef idx="minor">
-            <a:schemeClr val="lt1"/>
-          </a:fontRef>
-        </p:style>
-        <p:txBody>
-          <a:bodyPr rtlCol="0" anchor="ctr"/>
-          <a:lstStyle/>
-          <a:p>
-            <a:pPr algn="ctr"/>
-          </a:p>
-        </p:txBody>
-      </p:sp>
-      <p:sp>
-        <p:nvSpPr>
-          <p:cNvPr id="54" name="TextBox 53"/>
-          <p:cNvSpPr txBox="1"/>
-          <p:nvPr/>
-        </p:nvSpPr>
-        <p:spPr>
-          <a:xfrm>
-            <a:off x="8661400" y="2362200"/>
-            <a:ext cx="228600" cy="88900"/>
-          </a:xfrm>
-          <a:prstGeom prst="rect">
-            <a:avLst/>
-          </a:prstGeom>
-          <a:noFill/>
-        </p:spPr>
-        <p:txBody>
-          <a:bodyPr wrap="square">
-            <a:spAutoFit/>
-          </a:bodyPr>
-          <a:lstStyle/>
-          <a:p>
-            <a:pPr algn="l"/>
-            <a:r>
-              <a:rPr sz="800" b="0" i="0">
-                <a:solidFill>
-                  <a:srgbClr val="888888"/>
-                </a:solidFill>
-                <a:latin typeface="Noto Sans KR"/>
-              </a:rPr>
-              <a:t>70%</a:t>
-            </a:r>
-          </a:p>
-        </p:txBody>
-      </p:sp>
-      <p:sp>
-        <p:nvSpPr>
-          <p:cNvPr id="55" name="TextBox 54"/>
-          <p:cNvSpPr txBox="1"/>
-          <p:nvPr/>
-        </p:nvSpPr>
-        <p:spPr>
-          <a:xfrm>
-            <a:off x="5308600" y="2501900"/>
-            <a:ext cx="444500" cy="88900"/>
-          </a:xfrm>
-          <a:prstGeom prst="rect">
-            <a:avLst/>
-          </a:prstGeom>
-          <a:noFill/>
-        </p:spPr>
-        <p:txBody>
-          <a:bodyPr wrap="square">
-            <a:spAutoFit/>
-          </a:bodyPr>
-          <a:lstStyle/>
-          <a:p>
-            <a:pPr algn="l"/>
-            <a:r>
-              <a:rPr sz="800" b="1" i="0">
-                <a:solidFill>
-                  <a:srgbClr val="111111"/>
-                </a:solidFill>
-                <a:latin typeface="Noto Sans KR"/>
-              </a:rPr>
-              <a:t>HouseZero</a:t>
-            </a:r>
-          </a:p>
-        </p:txBody>
-      </p:sp>
-      <p:sp>
-        <p:nvSpPr>
-          <p:cNvPr id="56" name="Rectangle 55"/>
-          <p:cNvSpPr/>
-          <p:nvPr/>
-        </p:nvSpPr>
-        <p:spPr>
-          <a:xfrm>
-            <a:off x="5778500" y="2514600"/>
-            <a:ext cx="2857500" cy="76200"/>
-          </a:xfrm>
-          <a:prstGeom prst="rect">
-            <a:avLst/>
-          </a:prstGeom>
-          <a:solidFill>
-            <a:srgbClr val="EFEFEF"/>
-          </a:solidFill>
-          <a:ln>
-            <a:noFill/>
-          </a:ln>
-        </p:spPr>
-        <p:style>
-          <a:lnRef idx="1">
-            <a:schemeClr val="accent1"/>
-          </a:lnRef>
-          <a:fillRef idx="3">
-            <a:schemeClr val="accent1"/>
-          </a:fillRef>
-          <a:effectRef idx="2">
-            <a:schemeClr val="accent1"/>
-          </a:effectRef>
-          <a:fontRef idx="minor">
-            <a:schemeClr val="lt1"/>
-          </a:fontRef>
-        </p:style>
-        <p:txBody>
-          <a:bodyPr rtlCol="0" anchor="ctr"/>
-          <a:lstStyle/>
-          <a:p>
-            <a:pPr algn="ctr"/>
-          </a:p>
-        </p:txBody>
-      </p:sp>
-      <p:sp>
-        <p:nvSpPr>
-          <p:cNvPr id="57" name="Rectangle 56"/>
-          <p:cNvSpPr/>
-          <p:nvPr/>
-        </p:nvSpPr>
-        <p:spPr>
-          <a:xfrm>
-            <a:off x="5778500" y="2514600"/>
+            <a:off x="5778500" y="2540000"/>
             <a:ext cx="2254250" cy="76200"/>
           </a:xfrm>
           <a:prstGeom prst="rect">
@@ -6024,13 +6012,13 @@
       </p:sp>
       <p:sp>
         <p:nvSpPr>
-          <p:cNvPr id="58" name="TextBox 57"/>
+          <p:cNvPr id="55" name="TextBox 54"/>
           <p:cNvSpPr txBox="1"/>
           <p:nvPr/>
         </p:nvSpPr>
         <p:spPr>
           <a:xfrm>
-            <a:off x="8661400" y="2501900"/>
+            <a:off x="8661400" y="2527300"/>
             <a:ext cx="228600" cy="88900"/>
           </a:xfrm>
           <a:prstGeom prst="rect">
@@ -6059,13 +6047,13 @@
       </p:sp>
       <p:sp>
         <p:nvSpPr>
-          <p:cNvPr id="59" name="TextBox 58"/>
+          <p:cNvPr id="56" name="TextBox 55"/>
           <p:cNvSpPr txBox="1"/>
           <p:nvPr/>
         </p:nvSpPr>
         <p:spPr>
           <a:xfrm>
-            <a:off x="5308600" y="2616200"/>
+            <a:off x="5308600" y="2641600"/>
             <a:ext cx="3365500" cy="88900"/>
           </a:xfrm>
           <a:prstGeom prst="rect">
@@ -6094,13 +6082,13 @@
       </p:sp>
       <p:sp>
         <p:nvSpPr>
-          <p:cNvPr id="60" name="Rectangle 59"/>
+          <p:cNvPr id="57" name="Rectangle 56"/>
           <p:cNvSpPr/>
           <p:nvPr/>
         </p:nvSpPr>
         <p:spPr>
           <a:xfrm>
-            <a:off x="5245100" y="2768600"/>
+            <a:off x="5245100" y="2794000"/>
             <a:ext cx="1720850" cy="482600"/>
           </a:xfrm>
           <a:prstGeom prst="rect">
@@ -6137,13 +6125,13 @@
       </p:sp>
       <p:sp>
         <p:nvSpPr>
-          <p:cNvPr id="61" name="TextBox 60"/>
+          <p:cNvPr id="58" name="TextBox 57"/>
           <p:cNvSpPr txBox="1"/>
           <p:nvPr/>
         </p:nvSpPr>
         <p:spPr>
           <a:xfrm>
-            <a:off x="5308600" y="2819400"/>
+            <a:off x="5308600" y="2844800"/>
             <a:ext cx="1593850" cy="88900"/>
           </a:xfrm>
           <a:prstGeom prst="rect">
@@ -6172,13 +6160,13 @@
       </p:sp>
       <p:sp>
         <p:nvSpPr>
-          <p:cNvPr id="62" name="TextBox 61"/>
+          <p:cNvPr id="59" name="TextBox 58"/>
           <p:cNvSpPr txBox="1"/>
           <p:nvPr/>
         </p:nvSpPr>
         <p:spPr>
           <a:xfrm>
-            <a:off x="5308600" y="2908300"/>
+            <a:off x="5308600" y="2933700"/>
             <a:ext cx="1593850" cy="241300"/>
           </a:xfrm>
           <a:prstGeom prst="rect">
@@ -6207,13 +6195,13 @@
       </p:sp>
       <p:sp>
         <p:nvSpPr>
-          <p:cNvPr id="63" name="Rectangle 62"/>
+          <p:cNvPr id="60" name="Rectangle 59"/>
           <p:cNvSpPr/>
           <p:nvPr/>
         </p:nvSpPr>
         <p:spPr>
           <a:xfrm>
-            <a:off x="7016750" y="2768600"/>
+            <a:off x="7016750" y="2794000"/>
             <a:ext cx="1720850" cy="482600"/>
           </a:xfrm>
           <a:prstGeom prst="rect">
@@ -6250,13 +6238,13 @@
       </p:sp>
       <p:sp>
         <p:nvSpPr>
-          <p:cNvPr id="64" name="TextBox 63"/>
+          <p:cNvPr id="61" name="TextBox 60"/>
           <p:cNvSpPr txBox="1"/>
           <p:nvPr/>
         </p:nvSpPr>
         <p:spPr>
           <a:xfrm>
-            <a:off x="7080250" y="2819400"/>
+            <a:off x="7080250" y="2844800"/>
             <a:ext cx="1593850" cy="88900"/>
           </a:xfrm>
           <a:prstGeom prst="rect">
@@ -6285,13 +6273,13 @@
       </p:sp>
       <p:sp>
         <p:nvSpPr>
-          <p:cNvPr id="65" name="TextBox 64"/>
+          <p:cNvPr id="62" name="TextBox 61"/>
           <p:cNvSpPr txBox="1"/>
           <p:nvPr/>
         </p:nvSpPr>
         <p:spPr>
           <a:xfrm>
-            <a:off x="7080250" y="2908300"/>
+            <a:off x="7080250" y="2933700"/>
             <a:ext cx="1593850" cy="241300"/>
           </a:xfrm>
           <a:prstGeom prst="rect">
